--- a/Day4/Personal Finance.pptx
+++ b/Day4/Personal Finance.pptx
@@ -7817,7 +7817,7 @@
           <a:p>
             <a:r>
               <a:rPr lang="en-US"/>
-              <a:t>It does NOT constitute Financial Advise</a:t>
+              <a:t>It does NOT constitute Financial Advice</a:t>
             </a:r>
             <a:endParaRPr lang="en-US"/>
           </a:p>
@@ -8228,7 +8228,7 @@
             </a:pPr>
             <a:r>
               <a:rPr lang="en-US"/>
-              <a:t>How much tax does an invidual earning 20 Lakhs p.a. pay ?</a:t>
+              <a:t>How much tax does an individual earning 20 Lakhs p.a. pay ?</a:t>
             </a:r>
             <a:endParaRPr lang="en-US"/>
           </a:p>
@@ -9387,7 +9387,7 @@
 </file>
 
 <file path=ppt/slides/slide6.xml><?xml version="1.0" encoding="utf-8"?>
-<p:sld xmlns:a="http://schemas.openxmlformats.org/drawingml/2006/main" xmlns:r="http://schemas.openxmlformats.org/officeDocument/2006/relationships" xmlns:p="http://schemas.openxmlformats.org/presentationml/2006/main">
+<p:sld xmlns:a="http://schemas.openxmlformats.org/drawingml/2006/main" xmlns:r="http://schemas.openxmlformats.org/officeDocument/2006/relationships" xmlns:p="http://schemas.openxmlformats.org/presentationml/2006/main" show="0">
   <p:cSld>
     <p:spTree>
       <p:nvGrpSpPr>
@@ -9621,6 +9621,7 @@
   <p:clrMapOvr>
     <a:masterClrMapping/>
   </p:clrMapOvr>
+  <p:transition/>
   <p:timing>
     <p:tnLst>
       <p:par>
@@ -9794,7 +9795,7 @@
 </file>
 
 <file path=ppt/slides/slide7.xml><?xml version="1.0" encoding="utf-8"?>
-<p:sld xmlns:a="http://schemas.openxmlformats.org/drawingml/2006/main" xmlns:r="http://schemas.openxmlformats.org/officeDocument/2006/relationships" xmlns:p="http://schemas.openxmlformats.org/presentationml/2006/main">
+<p:sld xmlns:a="http://schemas.openxmlformats.org/drawingml/2006/main" xmlns:r="http://schemas.openxmlformats.org/officeDocument/2006/relationships" xmlns:p="http://schemas.openxmlformats.org/presentationml/2006/main" show="0">
   <p:cSld>
     <p:spTree>
       <p:nvGrpSpPr>
@@ -10143,6 +10144,7 @@
   <p:clrMapOvr>
     <a:masterClrMapping/>
   </p:clrMapOvr>
+  <p:transition/>
   <p:timing>
     <p:tnLst>
       <p:par>
